--- a/final_presentations/Presentation_CLW.pptx
+++ b/final_presentations/Presentation_CLW.pptx
@@ -17459,7 +17459,7 @@
           <a:p>
             <a:fld id="{59053860-10CB-452B-ADB2-A5C9C457B094}" type="datetimeFigureOut">
               <a:rPr lang="en-US" smtClean="0"/>
-              <a:t>3/27/2026</a:t>
+              <a:t>8/1/2026</a:t>
             </a:fld>
             <a:endParaRPr lang="en-US" dirty="0"/>
           </a:p>
@@ -17873,7 +17873,7 @@
           <a:p>
             <a:fld id="{A4FBDB26-F38C-40E6-B731-5221B6B5282A}" type="datetimeFigureOut">
               <a:rPr lang="en-US" smtClean="0"/>
-              <a:t>3/27/2026</a:t>
+              <a:t>8/1/2026</a:t>
             </a:fld>
             <a:endParaRPr lang="en-US" dirty="0"/>
           </a:p>
@@ -18071,7 +18071,7 @@
           <a:p>
             <a:fld id="{A4FBDB26-F38C-40E6-B731-5221B6B5282A}" type="datetimeFigureOut">
               <a:rPr lang="en-US" smtClean="0"/>
-              <a:t>3/27/2026</a:t>
+              <a:t>8/1/2026</a:t>
             </a:fld>
             <a:endParaRPr lang="en-US" dirty="0"/>
           </a:p>
@@ -18279,7 +18279,7 @@
           <a:p>
             <a:fld id="{A4FBDB26-F38C-40E6-B731-5221B6B5282A}" type="datetimeFigureOut">
               <a:rPr lang="en-US" smtClean="0"/>
-              <a:t>3/27/2026</a:t>
+              <a:t>8/1/2026</a:t>
             </a:fld>
             <a:endParaRPr lang="en-US" dirty="0"/>
           </a:p>
@@ -18477,7 +18477,7 @@
           <a:p>
             <a:fld id="{A4FBDB26-F38C-40E6-B731-5221B6B5282A}" type="datetimeFigureOut">
               <a:rPr lang="en-US" smtClean="0"/>
-              <a:t>3/27/2026</a:t>
+              <a:t>8/1/2026</a:t>
             </a:fld>
             <a:endParaRPr lang="en-US" dirty="0"/>
           </a:p>
@@ -18752,7 +18752,7 @@
           <a:p>
             <a:fld id="{A4FBDB26-F38C-40E6-B731-5221B6B5282A}" type="datetimeFigureOut">
               <a:rPr lang="en-US" smtClean="0"/>
-              <a:t>3/27/2026</a:t>
+              <a:t>8/1/2026</a:t>
             </a:fld>
             <a:endParaRPr lang="en-US" dirty="0"/>
           </a:p>
@@ -19017,7 +19017,7 @@
           <a:p>
             <a:fld id="{A4FBDB26-F38C-40E6-B731-5221B6B5282A}" type="datetimeFigureOut">
               <a:rPr lang="en-US" smtClean="0"/>
-              <a:t>3/27/2026</a:t>
+              <a:t>8/1/2026</a:t>
             </a:fld>
             <a:endParaRPr lang="en-US" dirty="0"/>
           </a:p>
@@ -19429,7 +19429,7 @@
           <a:p>
             <a:fld id="{A4FBDB26-F38C-40E6-B731-5221B6B5282A}" type="datetimeFigureOut">
               <a:rPr lang="en-US" smtClean="0"/>
-              <a:t>3/27/2026</a:t>
+              <a:t>8/1/2026</a:t>
             </a:fld>
             <a:endParaRPr lang="en-US" dirty="0"/>
           </a:p>
@@ -19570,7 +19570,7 @@
           <a:p>
             <a:fld id="{A4FBDB26-F38C-40E6-B731-5221B6B5282A}" type="datetimeFigureOut">
               <a:rPr lang="en-US" smtClean="0"/>
-              <a:t>3/27/2026</a:t>
+              <a:t>8/1/2026</a:t>
             </a:fld>
             <a:endParaRPr lang="en-US" dirty="0"/>
           </a:p>
@@ -19683,7 +19683,7 @@
           <a:p>
             <a:fld id="{A4FBDB26-F38C-40E6-B731-5221B6B5282A}" type="datetimeFigureOut">
               <a:rPr lang="en-US" smtClean="0"/>
-              <a:t>3/27/2026</a:t>
+              <a:t>8/1/2026</a:t>
             </a:fld>
             <a:endParaRPr lang="en-US" dirty="0"/>
           </a:p>
@@ -19994,7 +19994,7 @@
           <a:p>
             <a:fld id="{A4FBDB26-F38C-40E6-B731-5221B6B5282A}" type="datetimeFigureOut">
               <a:rPr lang="en-US" smtClean="0"/>
-              <a:t>3/27/2026</a:t>
+              <a:t>8/1/2026</a:t>
             </a:fld>
             <a:endParaRPr lang="en-US" dirty="0"/>
           </a:p>
@@ -20282,7 +20282,7 @@
           <a:p>
             <a:fld id="{A4FBDB26-F38C-40E6-B731-5221B6B5282A}" type="datetimeFigureOut">
               <a:rPr lang="en-US" smtClean="0"/>
-              <a:t>3/27/2026</a:t>
+              <a:t>8/1/2026</a:t>
             </a:fld>
             <a:endParaRPr lang="en-US" dirty="0"/>
           </a:p>
@@ -20531,7 +20531,7 @@
           <a:p>
             <a:fld id="{A4FBDB26-F38C-40E6-B731-5221B6B5282A}" type="datetimeFigureOut">
               <a:rPr lang="en-US" smtClean="0"/>
-              <a:t>3/27/2026</a:t>
+              <a:t>8/1/2026</a:t>
             </a:fld>
             <a:endParaRPr lang="en-US" dirty="0"/>
           </a:p>
@@ -20992,15 +20992,12 @@
                 <a:spcPts val="0"/>
               </a:spcAft>
             </a:pPr>
-            <a:r>
-              <a:rPr lang="en-US" sz="2400" b="1" kern="0" dirty="0">
-                <a:effectLst/>
-                <a:latin typeface="Helvetica" pitchFamily="2" charset="0"/>
-                <a:ea typeface="Times New Roman" panose="02020603050405020304" pitchFamily="18" charset="0"/>
-                <a:cs typeface="Times New Roman" panose="02020603050405020304" pitchFamily="18" charset="0"/>
-              </a:rPr>
-              <a:t>Report on the Role of the Electrical Department in Bangladesh Railway</a:t>
-            </a:r>
+            <a:endParaRPr lang="en-US" sz="2400" b="1" kern="0" dirty="0">
+              <a:effectLst/>
+              <a:latin typeface="Helvetica" pitchFamily="2" charset="0"/>
+              <a:ea typeface="Times New Roman" panose="02020603050405020304" pitchFamily="18" charset="0"/>
+              <a:cs typeface="Times New Roman" panose="02020603050405020304" pitchFamily="18" charset="0"/>
+            </a:endParaRPr>
           </a:p>
           <a:p>
             <a:pPr marL="0" marR="0" algn="ctr">
@@ -21114,10 +21111,10 @@
           <p:nvPr/>
         </p:nvPicPr>
         <p:blipFill>
-          <a:blip r:embed="rId2">
+          <a:blip>
             <a:extLst>
               <a:ext uri="{96DAC541-7B7A-43D3-8B79-37D633B846F1}">
-                <asvg:svgBlip xmlns:asvg="http://schemas.microsoft.com/office/drawing/2016/SVG/main" r:embed="rId3"/>
+                <asvg:svgBlip xmlns:asvg="http://schemas.microsoft.com/office/drawing/2016/SVG/main" r:embed="rId2"/>
               </a:ext>
             </a:extLst>
           </a:blip>
